--- a/9주차/한국어/게임엔진기초_9주차_오프라인_과제안내.pptx
+++ b/9주차/한국어/게임엔진기초_9주차_오프라인_과제안내.pptx
@@ -113,7 +113,7 @@
   <p:extLst>
     <p:ext uri="{521415D9-36F7-43E2-AB2F-B90AF26B5E84}">
       <p14:sectionLst xmlns:p14="http://schemas.microsoft.com/office/powerpoint/2010/main">
-        <p14:section name="과제" id="{450d485e-7fbf-9056-7053-930c63b8f2ca}">
+        <p14:section name="과제" id="{19c41678-a417-a7c9-1151-4cfe512fe102}">
           <p14:sldIdLst>
             <p14:sldId id="256"/>
             <p14:sldId id="257"/>
@@ -2540,7 +2540,7 @@
                 <a:ea typeface="Noto Sans KR" pitchFamily="34" charset="-122"/>
                 <a:cs typeface="Noto Sans KR" pitchFamily="34" charset="-120"/>
               </a:rPr>
-              <a:t>다음 수업(11/9) 시작 전까지. 기말 시연은 12/14(월)</a:t>
+              <a:t>다음 수업(11/9) 시작 전까지. 기말 시연은 12/21(월)</a:t>
             </a:r>
             <a:endParaRPr lang="en-US" sz="1700" dirty="0"/>
           </a:p>
@@ -2708,7 +2708,7 @@
                 <a:ea typeface="Noto Sans KR" pitchFamily="34" charset="-122"/>
                 <a:cs typeface="Noto Sans KR" pitchFamily="34" charset="-120"/>
               </a:rPr>
-              <a:t>12/14 (월)</a:t>
+              <a:t>12/21 (월)</a:t>
             </a:r>
             <a:endParaRPr lang="en-US" sz="1500" dirty="0"/>
           </a:p>
@@ -4265,7 +4265,7 @@
                 <a:gridCol w="1280160"/>
                 <a:gridCol w="8348472"/>
               </a:tblGrid>
-              <a:tr h="512064">
+              <a:tr h="475488">
                 <a:tc>
                   <a:txBody>
                     <a:bodyPr/>
@@ -4471,7 +4471,7 @@
                   </a:tcPr>
                 </a:tc>
               </a:tr>
-              <a:tr h="512064">
+              <a:tr h="475488">
                 <a:tc>
                   <a:txBody>
                     <a:bodyPr/>
@@ -4677,7 +4677,7 @@
                   </a:tcPr>
                 </a:tc>
               </a:tr>
-              <a:tr h="512064">
+              <a:tr h="475488">
                 <a:tc>
                   <a:txBody>
                     <a:bodyPr/>
@@ -4883,7 +4883,7 @@
                   </a:tcPr>
                 </a:tc>
               </a:tr>
-              <a:tr h="512064">
+              <a:tr h="475488">
                 <a:tc>
                   <a:txBody>
                     <a:bodyPr/>
@@ -5089,7 +5089,7 @@
                   </a:tcPr>
                 </a:tc>
               </a:tr>
-              <a:tr h="512064">
+              <a:tr h="475488">
                 <a:tc>
                   <a:txBody>
                     <a:bodyPr/>
@@ -5295,7 +5295,7 @@
                   </a:tcPr>
                 </a:tc>
               </a:tr>
-              <a:tr h="512064">
+              <a:tr h="475488">
                 <a:tc>
                   <a:txBody>
                     <a:bodyPr/>
@@ -5449,7 +5449,7 @@
                           <a:ea typeface="Noto Sans KR" pitchFamily="34" charset="-122"/>
                           <a:cs typeface="Noto Sans KR" pitchFamily="34" charset="-120"/>
                         </a:rPr>
-                        <a:t>플레이테스트 · 난이도 · 버그 잡기</a:t>
+                        <a:t>플레이테스트 · 난이도</a:t>
                       </a:r>
                       <a:endParaRPr lang="en-US" sz="1400" dirty="0">
                         <a:latin typeface="Noto Sans KR" charset="0"/>
@@ -5501,7 +5501,7 @@
                   </a:tcPr>
                 </a:tc>
               </a:tr>
-              <a:tr h="512064">
+              <a:tr h="475488">
                 <a:tc>
                   <a:txBody>
                     <a:bodyPr/>
@@ -5655,7 +5655,7 @@
                           <a:ea typeface="Noto Sans KR" pitchFamily="34" charset="-122"/>
                           <a:cs typeface="Noto Sans KR" pitchFamily="34" charset="-120"/>
                         </a:rPr>
-                        <a:t>마무리 · Windows 빌드 · 시연 연습</a:t>
+                        <a:t>버그 잡기 · 다듬기</a:t>
                       </a:r>
                       <a:endParaRPr lang="en-US" sz="1400" dirty="0">
                         <a:latin typeface="Noto Sans KR" charset="0"/>
@@ -5707,7 +5707,7 @@
                   </a:tcPr>
                 </a:tc>
               </a:tr>
-              <a:tr h="512064">
+              <a:tr h="475488">
                 <a:tc>
                   <a:txBody>
                     <a:bodyPr/>
@@ -5853,6 +5853,76 @@
                         <a:buNone/>
                       </a:pPr>
                       <a:r>
+                        <a:rPr lang="en-US" sz="1400" dirty="0">
+                          <a:solidFill>
+                            <a:srgbClr val="3A434D"/>
+                          </a:solidFill>
+                          <a:latin typeface="Noto Sans KR" pitchFamily="34" charset="0"/>
+                          <a:ea typeface="Noto Sans KR" pitchFamily="34" charset="-122"/>
+                          <a:cs typeface="Noto Sans KR" pitchFamily="34" charset="-120"/>
+                        </a:rPr>
+                        <a:t>마무리 · Windows 빌드 · 시연 연습</a:t>
+                      </a:r>
+                      <a:endParaRPr lang="en-US" sz="1400" dirty="0">
+                        <a:latin typeface="Noto Sans KR" charset="0"/>
+                        <a:ea typeface="Noto Sans KR" charset="0"/>
+                        <a:cs typeface="Noto Sans KR" charset="0"/>
+                      </a:endParaRPr>
+                    </a:p>
+                  </a:txBody>
+                  <a:tcPr marL="91440" marR="91440" marT="54864" marB="54864" anchor="ctr">
+                    <a:lnL w="9525" cap="flat" cmpd="sng" algn="ctr">
+                      <a:solidFill>
+                        <a:srgbClr val="D9DEE4"/>
+                      </a:solidFill>
+                      <a:prstDash val="solid"/>
+                      <a:round/>
+                      <a:headEnd type="none" w="med" len="med"/>
+                      <a:tailEnd type="none" w="med" len="med"/>
+                    </a:lnL>
+                    <a:lnR w="9525" cap="flat" cmpd="sng" algn="ctr">
+                      <a:solidFill>
+                        <a:srgbClr val="D9DEE4"/>
+                      </a:solidFill>
+                      <a:prstDash val="solid"/>
+                      <a:round/>
+                      <a:headEnd type="none" w="med" len="med"/>
+                      <a:tailEnd type="none" w="med" len="med"/>
+                    </a:lnR>
+                    <a:lnT w="9525" cap="flat" cmpd="sng" algn="ctr">
+                      <a:solidFill>
+                        <a:srgbClr val="D9DEE4"/>
+                      </a:solidFill>
+                      <a:prstDash val="solid"/>
+                      <a:round/>
+                      <a:headEnd type="none" w="med" len="med"/>
+                      <a:tailEnd type="none" w="med" len="med"/>
+                    </a:lnT>
+                    <a:lnB w="9525" cap="flat" cmpd="sng" algn="ctr">
+                      <a:solidFill>
+                        <a:srgbClr val="D9DEE4"/>
+                      </a:solidFill>
+                      <a:prstDash val="solid"/>
+                      <a:round/>
+                      <a:headEnd type="none" w="med" len="med"/>
+                      <a:tailEnd type="none" w="med" len="med"/>
+                    </a:lnB>
+                    <a:solidFill>
+                      <a:srgbClr val="FFFFFF"/>
+                    </a:solidFill>
+                  </a:tcPr>
+                </a:tc>
+              </a:tr>
+              <a:tr h="475488">
+                <a:tc>
+                  <a:txBody>
+                    <a:bodyPr/>
+                    <a:lstStyle/>
+                    <a:p>
+                      <a:pPr algn="ctr" indent="0" marL="0">
+                        <a:buNone/>
+                      </a:pPr>
+                      <a:r>
                         <a:rPr lang="en-US" sz="1400" b="1" dirty="0">
                           <a:solidFill>
                             <a:srgbClr val="3A434D"/>
@@ -5861,7 +5931,143 @@
                           <a:ea typeface="Noto Sans KR" pitchFamily="34" charset="-122"/>
                           <a:cs typeface="Noto Sans KR" pitchFamily="34" charset="-120"/>
                         </a:rPr>
-                        <a:t>기말 시연</a:t>
+                        <a:t>16주차</a:t>
+                      </a:r>
+                      <a:endParaRPr lang="en-US" sz="1400" dirty="0">
+                        <a:latin typeface="Noto Sans KR" charset="0"/>
+                        <a:ea typeface="Noto Sans KR" charset="0"/>
+                        <a:cs typeface="Noto Sans KR" charset="0"/>
+                      </a:endParaRPr>
+                    </a:p>
+                  </a:txBody>
+                  <a:tcPr marL="91440" marR="91440" marT="54864" marB="54864" anchor="ctr">
+                    <a:lnL w="9525" cap="flat" cmpd="sng" algn="ctr">
+                      <a:solidFill>
+                        <a:srgbClr val="D9DEE4"/>
+                      </a:solidFill>
+                      <a:prstDash val="solid"/>
+                      <a:round/>
+                      <a:headEnd type="none" w="med" len="med"/>
+                      <a:tailEnd type="none" w="med" len="med"/>
+                    </a:lnL>
+                    <a:lnR w="9525" cap="flat" cmpd="sng" algn="ctr">
+                      <a:solidFill>
+                        <a:srgbClr val="D9DEE4"/>
+                      </a:solidFill>
+                      <a:prstDash val="solid"/>
+                      <a:round/>
+                      <a:headEnd type="none" w="med" len="med"/>
+                      <a:tailEnd type="none" w="med" len="med"/>
+                    </a:lnR>
+                    <a:lnT w="9525" cap="flat" cmpd="sng" algn="ctr">
+                      <a:solidFill>
+                        <a:srgbClr val="D9DEE4"/>
+                      </a:solidFill>
+                      <a:prstDash val="solid"/>
+                      <a:round/>
+                      <a:headEnd type="none" w="med" len="med"/>
+                      <a:tailEnd type="none" w="med" len="med"/>
+                    </a:lnT>
+                    <a:lnB w="9525" cap="flat" cmpd="sng" algn="ctr">
+                      <a:solidFill>
+                        <a:srgbClr val="D9DEE4"/>
+                      </a:solidFill>
+                      <a:prstDash val="solid"/>
+                      <a:round/>
+                      <a:headEnd type="none" w="med" len="med"/>
+                      <a:tailEnd type="none" w="med" len="med"/>
+                    </a:lnB>
+                    <a:solidFill>
+                      <a:srgbClr val="F3F5F7"/>
+                    </a:solidFill>
+                  </a:tcPr>
+                </a:tc>
+                <a:tc>
+                  <a:txBody>
+                    <a:bodyPr/>
+                    <a:lstStyle/>
+                    <a:p>
+                      <a:pPr algn="ctr" indent="0" marL="0">
+                        <a:buNone/>
+                      </a:pPr>
+                      <a:r>
+                        <a:rPr lang="en-US" sz="1400" dirty="0">
+                          <a:solidFill>
+                            <a:srgbClr val="3A434D"/>
+                          </a:solidFill>
+                          <a:latin typeface="Noto Sans KR" pitchFamily="34" charset="0"/>
+                          <a:ea typeface="Noto Sans KR" pitchFamily="34" charset="-122"/>
+                          <a:cs typeface="Noto Sans KR" pitchFamily="34" charset="-120"/>
+                        </a:rPr>
+                        <a:t>12/21</a:t>
+                      </a:r>
+                      <a:endParaRPr lang="en-US" sz="1400" dirty="0">
+                        <a:latin typeface="Noto Sans KR" charset="0"/>
+                        <a:ea typeface="Noto Sans KR" charset="0"/>
+                        <a:cs typeface="Noto Sans KR" charset="0"/>
+                      </a:endParaRPr>
+                    </a:p>
+                  </a:txBody>
+                  <a:tcPr marL="91440" marR="91440" marT="54864" marB="54864" anchor="ctr">
+                    <a:lnL w="9525" cap="flat" cmpd="sng" algn="ctr">
+                      <a:solidFill>
+                        <a:srgbClr val="D9DEE4"/>
+                      </a:solidFill>
+                      <a:prstDash val="solid"/>
+                      <a:round/>
+                      <a:headEnd type="none" w="med" len="med"/>
+                      <a:tailEnd type="none" w="med" len="med"/>
+                    </a:lnL>
+                    <a:lnR w="9525" cap="flat" cmpd="sng" algn="ctr">
+                      <a:solidFill>
+                        <a:srgbClr val="D9DEE4"/>
+                      </a:solidFill>
+                      <a:prstDash val="solid"/>
+                      <a:round/>
+                      <a:headEnd type="none" w="med" len="med"/>
+                      <a:tailEnd type="none" w="med" len="med"/>
+                    </a:lnR>
+                    <a:lnT w="9525" cap="flat" cmpd="sng" algn="ctr">
+                      <a:solidFill>
+                        <a:srgbClr val="D9DEE4"/>
+                      </a:solidFill>
+                      <a:prstDash val="solid"/>
+                      <a:round/>
+                      <a:headEnd type="none" w="med" len="med"/>
+                      <a:tailEnd type="none" w="med" len="med"/>
+                    </a:lnT>
+                    <a:lnB w="9525" cap="flat" cmpd="sng" algn="ctr">
+                      <a:solidFill>
+                        <a:srgbClr val="D9DEE4"/>
+                      </a:solidFill>
+                      <a:prstDash val="solid"/>
+                      <a:round/>
+                      <a:headEnd type="none" w="med" len="med"/>
+                      <a:tailEnd type="none" w="med" len="med"/>
+                    </a:lnB>
+                    <a:solidFill>
+                      <a:srgbClr val="FFFFFF"/>
+                    </a:solidFill>
+                  </a:tcPr>
+                </a:tc>
+                <a:tc>
+                  <a:txBody>
+                    <a:bodyPr/>
+                    <a:lstStyle/>
+                    <a:p>
+                      <a:pPr algn="l" indent="0" marL="0">
+                        <a:buNone/>
+                      </a:pPr>
+                      <a:r>
+                        <a:rPr lang="en-US" sz="1400" b="1" dirty="0">
+                          <a:solidFill>
+                            <a:srgbClr val="3A434D"/>
+                          </a:solidFill>
+                          <a:latin typeface="Noto Sans KR" pitchFamily="34" charset="0"/>
+                          <a:ea typeface="Noto Sans KR" pitchFamily="34" charset="-122"/>
+                          <a:cs typeface="Noto Sans KR" pitchFamily="34" charset="-120"/>
+                        </a:rPr>
+                        <a:t>기말 시연 (기말고사)</a:t>
                       </a:r>
                       <a:endParaRPr lang="en-US" sz="1400" dirty="0">
                         <a:latin typeface="Noto Sans KR" charset="0"/>
